--- a/week5/week5_chap7_python_first_steps.pptx
+++ b/week5/week5_chap7_python_first_steps.pptx
@@ -8326,7 +8326,7 @@
           </a:p>
           <a:p>
             <a:r>
-              <a:rPr lang="en-US" sz="2800" b="1">
+              <a:rPr lang="en-US" sz="2800" b="1" dirty="0">
                 <a:latin typeface="Courier New" panose="02070309020205020404" pitchFamily="49" charset="0"/>
                 <a:cs typeface="Courier New" panose="02070309020205020404" pitchFamily="49" charset="0"/>
               </a:rPr>
@@ -11269,7 +11269,7 @@
         </p:nvSpPr>
         <p:spPr>
           <a:xfrm>
-            <a:off x="4828666" y="500705"/>
+            <a:off x="3888504" y="426277"/>
             <a:ext cx="4414991" cy="600164"/>
           </a:xfrm>
           <a:prstGeom prst="rect">
@@ -11503,7 +11503,7 @@
                 <a:latin typeface="Courier New" panose="02070309020205020404" pitchFamily="49" charset="0"/>
                 <a:cs typeface="Courier New" panose="02070309020205020404" pitchFamily="49" charset="0"/>
               </a:rPr>
-              <a:t> (Line)</a:t>
+              <a:t>(Line)</a:t>
             </a:r>
           </a:p>
         </p:txBody>
@@ -12197,7 +12197,7 @@
         <p:spPr>
           <a:xfrm>
             <a:off x="544223" y="1924084"/>
-            <a:ext cx="11103554" cy="4031873"/>
+            <a:ext cx="11103554" cy="3046988"/>
           </a:xfrm>
           <a:prstGeom prst="rect">
             <a:avLst/>
@@ -12221,38 +12221,16 @@
             </a:r>
           </a:p>
           <a:p>
-            <a:pPr marL="514350" indent="-514350">
-              <a:buAutoNum type="arabicPeriod"/>
-            </a:pPr>
             <a:endParaRPr lang="en-US" sz="3200" dirty="0">
               <a:latin typeface="Helvetica Light" panose="020B0403020202020204" pitchFamily="34" charset="0"/>
             </a:endParaRPr>
           </a:p>
           <a:p>
-            <a:pPr marL="514350" indent="-514350">
-              <a:buAutoNum type="arabicPeriod"/>
-            </a:pPr>
             <a:r>
               <a:rPr lang="en-US" sz="3200" dirty="0">
                 <a:latin typeface="Helvetica Light" panose="020B0403020202020204" pitchFamily="34" charset="0"/>
               </a:rPr>
-              <a:t>Read Chapter 7, Preview Chapter 8</a:t>
-            </a:r>
-          </a:p>
-          <a:p>
-            <a:pPr marL="514350" indent="-514350">
-              <a:buAutoNum type="arabicPeriod"/>
-            </a:pPr>
-            <a:endParaRPr lang="en-US" sz="3200" dirty="0">
-              <a:latin typeface="Helvetica Light" panose="020B0403020202020204" pitchFamily="34" charset="0"/>
-            </a:endParaRPr>
-          </a:p>
-          <a:p>
-            <a:r>
-              <a:rPr lang="en-US" sz="3200" dirty="0">
-                <a:latin typeface="Helvetica Light" panose="020B0403020202020204" pitchFamily="34" charset="0"/>
-              </a:rPr>
-              <a:t>3. Go through </a:t>
+              <a:t>2. Go through </a:t>
             </a:r>
             <a:r>
               <a:rPr lang="en-US" sz="3200" dirty="0" err="1">
@@ -12314,7 +12292,7 @@
               <a:rPr lang="en-US" sz="3200" dirty="0">
                 <a:latin typeface="Helvetica Light" panose="020B0403020202020204" pitchFamily="34" charset="0"/>
               </a:rPr>
-              <a:t>4. Converse about independent project ideas if needed</a:t>
+              <a:t>3. Converse about independent project ideas if needed</a:t>
             </a:r>
           </a:p>
         </p:txBody>

--- a/week5/week5_chap7_python_first_steps.pptx
+++ b/week5/week5_chap7_python_first_steps.pptx
@@ -5106,64 +5106,6 @@
                 <a:latin typeface="Helvetica Light" panose="020B0403020202020204" pitchFamily="34" charset="0"/>
               </a:rPr>
               <a:t>Week 5</a:t>
-            </a:r>
-          </a:p>
-        </p:txBody>
-      </p:sp>
-      <p:sp>
-        <p:nvSpPr>
-          <p:cNvPr id="7" name="TextBox 6">
-            <a:extLst>
-              <a:ext uri="{FF2B5EF4-FFF2-40B4-BE49-F238E27FC236}">
-                <a16:creationId xmlns:a16="http://schemas.microsoft.com/office/drawing/2014/main" id="{DD88A66A-0419-DE4E-B4C6-7E8E39AE4222}"/>
-              </a:ext>
-            </a:extLst>
-          </p:cNvPr>
-          <p:cNvSpPr txBox="1"/>
-          <p:nvPr/>
-        </p:nvSpPr>
-        <p:spPr>
-          <a:xfrm>
-            <a:off x="1636285" y="5376405"/>
-            <a:ext cx="7096815" cy="461665"/>
-          </a:xfrm>
-          <a:prstGeom prst="rect">
-            <a:avLst/>
-          </a:prstGeom>
-          <a:noFill/>
-          <a:ln>
-            <a:solidFill>
-              <a:schemeClr val="tx1"/>
-            </a:solidFill>
-          </a:ln>
-        </p:spPr>
-        <p:txBody>
-          <a:bodyPr wrap="none" rtlCol="0">
-            <a:spAutoFit/>
-          </a:bodyPr>
-          <a:lstStyle/>
-          <a:p>
-            <a:r>
-              <a:rPr lang="en-US" sz="2400" dirty="0">
-                <a:ln>
-                  <a:solidFill>
-                    <a:schemeClr val="tx1"/>
-                  </a:solidFill>
-                </a:ln>
-                <a:latin typeface="Helvetica Light" panose="020B0403020202020204" pitchFamily="34" charset="0"/>
-              </a:rPr>
-              <a:t>Haddock and Dunn chapter 7, </a:t>
-            </a:r>
-            <a:r>
-              <a:rPr lang="en-US" sz="2400" i="1" dirty="0">
-                <a:ln>
-                  <a:solidFill>
-                    <a:schemeClr val="tx1"/>
-                  </a:solidFill>
-                </a:ln>
-                <a:latin typeface="Helvetica Light" panose="020B0403020202020204" pitchFamily="34" charset="0"/>
-              </a:rPr>
-              <a:t>preview chapter 8</a:t>
             </a:r>
           </a:p>
         </p:txBody>
